--- a/plans/deck-overview.pptx
+++ b/plans/deck-overview.pptx
@@ -23,6 +23,9 @@
     <p:sldId id="271" r:id="rId22"/>
     <p:sldId id="272" r:id="rId23"/>
     <p:sldId id="273" r:id="rId24"/>
+    <p:sldId id="274" r:id="rId25"/>
+    <p:sldId id="275" r:id="rId26"/>
+    <p:sldId id="276" r:id="rId27"/>
   </p:sldIdLst>
   <p:sldSz cx="12191695" cy="6858000" type="screen4x3"/>
   <p:notesSz cx="6858000" cy="9144000"/>
@@ -3475,7 +3478,7 @@
                   <a:srgbClr val="1A1A2E"/>
                 </a:solidFill>
               </a:rPr>
-              <a:t>What the operator does in Phase 1</a:t>
+              <a:t>Why learners come back</a:t>
             </a:r>
           </a:p>
         </p:txBody>
@@ -3502,31 +3505,14 @@
           </a:bodyPr>
           <a:lstStyle/>
           <a:p>
-            <a:pPr/>
-            <a:r>
-              <a:rPr sz="1600"/>
-              <a:t>Open Claude Code in the project repo (paid by Max).</a:t>
-            </a:r>
-          </a:p>
-          <a:p>
-            <a:pPr/>
-            <a:r>
-              <a:rPr sz="1600"/>
-              <a:t>Paste a knowledge file (PDF / markdown / slides as text).</a:t>
-            </a:r>
-          </a:p>
-          <a:p>
-            <a:pPr/>
-            <a:r>
-              <a:rPr sz="1600"/>
-              <a:t>Run /draft-topic slash command → Claude drafts JSON.</a:t>
-            </a:r>
-          </a:p>
-          <a:p>
-            <a:pPr/>
-            <a:r>
-              <a:rPr sz="1600"/>
-              <a:t>Local validators run automatically (catch known failure modes).</a:t>
+            <a:pPr algn="l">
+              <a:spcAft>
+                <a:spcPts val="800"/>
+              </a:spcAft>
+            </a:pPr>
+            <a:r>
+              <a:rPr sz="1800"/>
+              <a:t>Three mechanisms, each grounded in peer-reviewed cognitive-psychology research:</a:t>
             </a:r>
           </a:p>
           <a:p>
@@ -3537,7 +3523,7 @@
             </a:pPr>
             <a:r>
               <a:rPr sz="1600"/>
-              <a:t>Open admin tool → paste JSON → publish.</a:t>
+              <a:t>Spaced retrieval keeps yesterday's lesson alive. Expanding-interval</a:t>
             </a:r>
           </a:p>
           <a:p>
@@ -3548,7 +3534,62 @@
             </a:pPr>
             <a:r>
               <a:rPr sz="1800"/>
-              <a:t>~10 minutes per topic.</a:t>
+              <a:t>practice (1/3/7/14/30d) produces ~2× retention vs massed practice (spacing effect — Cepeda et al. 2008, Psych Sci; 254-study meta in Cepeda 2006). Without review, retention plateaus near 25% by day 6 (Murre &amp; Dros 2015, replicating Ebbinghaus 1885).</a:t>
+            </a:r>
+          </a:p>
+          <a:p>
+            <a:pPr>
+              <a:spcAft>
+                <a:spcPts val="600"/>
+              </a:spcAft>
+            </a:pPr>
+            <a:r>
+              <a:rPr sz="1600"/>
+              <a:t>Streaks + variable rewards convert intent into habit. Hook Model</a:t>
+            </a:r>
+          </a:p>
+          <a:p>
+            <a:pPr algn="l">
+              <a:spcAft>
+                <a:spcPts val="800"/>
+              </a:spcAft>
+            </a:pPr>
+            <a:r>
+              <a:rPr sz="1800"/>
+              <a:t>(trigger → action → variable reward → investment) plus loss-aversion via streak; Duolingo precedent — CURR +21%, DAU 4.5× over 4 years (Eyal 2014; Mazal 2022).</a:t>
+            </a:r>
+          </a:p>
+          <a:p>
+            <a:pPr>
+              <a:spcAft>
+                <a:spcPts val="600"/>
+              </a:spcAft>
+            </a:pPr>
+            <a:r>
+              <a:rPr sz="1600"/>
+              <a:t>**Cohort surface (peer + accountability) drives 75–96% completion vs</a:t>
+            </a:r>
+          </a:p>
+          <a:p>
+            <a:pPr algn="l">
+              <a:spcAft>
+                <a:spcPts val="800"/>
+              </a:spcAft>
+            </a:pPr>
+            <a:r>
+              <a:rPr sz="1800"/>
+              <a:t>3–10% MOOC.** Maven W1→W2 retention 96% vs MOOC 16%; altMBA 96% completion (Maven; Reich &amp; Ruipérez-Valiente 2019, Science).</a:t>
+            </a:r>
+          </a:p>
+          <a:p>
+            <a:pPr algn="l">
+              <a:spcAft>
+                <a:spcPts val="800"/>
+              </a:spcAft>
+            </a:pPr>
+            <a:r>
+              <a:rPr sz="1800"/>
+              <a:t>These aren't engagement gimmicks. Each is a measured intervention with an effect size we can hold ourselves to.</a:t>
             </a:r>
           </a:p>
         </p:txBody>
@@ -3600,7 +3641,7 @@
                   <a:srgbClr val="1A1A2E"/>
                 </a:solidFill>
               </a:rPr>
-              <a:t>What changes in Phase 2</a:t>
+              <a:t>Why SMEs ship better content</a:t>
             </a:r>
           </a:p>
         </p:txBody>
@@ -3634,56 +3675,7 @@
             </a:pPr>
             <a:r>
               <a:rPr sz="1800"/>
-              <a:t>Additive on Phase 1, behind feature flags, in this order:</a:t>
-            </a:r>
-          </a:p>
-          <a:p>
-            <a:pPr/>
-            <a:r>
-              <a:rPr sz="1600"/>
-              <a:t>Vercel Pro (TOS compliance for paid customers).</a:t>
-            </a:r>
-          </a:p>
-          <a:p>
-            <a:pPr/>
-            <a:r>
-              <a:rPr sz="1600"/>
-              <a:t>In-app AI generation pipeline (Inngest + Anthropic API).</a:t>
-            </a:r>
-          </a:p>
-          <a:p>
-            <a:pPr/>
-            <a:r>
-              <a:rPr sz="1600"/>
-              <a:t>Opus critiques Sonnet drafts; answer-justification audit.</a:t>
-            </a:r>
-          </a:p>
-          <a:p>
-            <a:pPr/>
-            <a:r>
-              <a:rPr sz="1600"/>
-              <a:t>Confidence routing + sampled spot-checks.</a:t>
-            </a:r>
-          </a:p>
-          <a:p>
-            <a:pPr/>
-            <a:r>
-              <a:rPr sz="1600"/>
-              <a:t>B2B controls: SME role, two-eye gate, per-tenant catalogs.</a:t>
-            </a:r>
-          </a:p>
-          <a:p>
-            <a:pPr/>
-            <a:r>
-              <a:rPr sz="1600"/>
-              <a:t>Stripe billing.</a:t>
-            </a:r>
-          </a:p>
-          <a:p>
-            <a:pPr/>
-            <a:r>
-              <a:rPr sz="1600"/>
-              <a:t>Embedding-based suggestion dedup.</a:t>
+              <a:t>Three scaffolds, each fixing a known SME failure mode:</a:t>
             </a:r>
           </a:p>
           <a:p>
@@ -3694,7 +3686,7 @@
             </a:pPr>
             <a:r>
               <a:rPr sz="1600"/>
-              <a:t>Post-publish quality signals → "pause-not-pull".</a:t>
+              <a:t>**CTA-style intake captures the 70% of decisions experts forget to</a:t>
             </a:r>
           </a:p>
           <a:p>
@@ -3705,7 +3697,62 @@
             </a:pPr>
             <a:r>
               <a:rPr sz="1800"/>
-              <a:t>Nothing from Phase 1 is thrown away.</a:t>
+              <a:t>mention.** Cognitive Task Analysis 5-probe intake (novice-error / one-principle / worked-example pair / boundary case / nearest confusable) (Clark, Feldon, van Merriënboer, Yates &amp; Early; Lee 2004: +46% post-training learning gain, Cohen's d ≈ 1.72).</a:t>
+            </a:r>
+          </a:p>
+          <a:p>
+            <a:pPr>
+              <a:spcAft>
+                <a:spcPts val="600"/>
+              </a:spcAft>
+            </a:pPr>
+            <a:r>
+              <a:rPr sz="1600"/>
+              <a:t>**Backward-design template forces "what's the test?" before "what's the</a:t>
+            </a:r>
+          </a:p>
+          <a:p>
+            <a:pPr algn="l">
+              <a:spcAft>
+                <a:spcPts val="800"/>
+              </a:spcAft>
+            </a:pPr>
+            <a:r>
+              <a:rPr sz="1800"/>
+              <a:t>lesson?"** (Wiggins &amp; McTighe 1998 — Understanding by Design).</a:t>
+            </a:r>
+          </a:p>
+          <a:p>
+            <a:pPr>
+              <a:spcAft>
+                <a:spcPts val="600"/>
+              </a:spcAft>
+            </a:pPr>
+            <a:r>
+              <a:rPr sz="1600"/>
+              <a:t>Critic flags expert blind spots before publish. SMEs systematically</a:t>
+            </a:r>
+          </a:p>
+          <a:p>
+            <a:pPr algn="l">
+              <a:spcAft>
+                <a:spcPts val="800"/>
+              </a:spcAft>
+            </a:pPr>
+            <a:r>
+              <a:rPr sz="1800"/>
+              <a:t>over-estimate novice prerequisites (Nathan &amp; Petrosino 2003 — expert blind spot; Hinds 1999 — curse of expertise).</a:t>
+            </a:r>
+          </a:p>
+          <a:p>
+            <a:pPr algn="l">
+              <a:spcAft>
+                <a:spcPts val="800"/>
+              </a:spcAft>
+            </a:pPr>
+            <a:r>
+              <a:rPr sz="1800"/>
+              <a:t>The premise: SMEs aren't bad teachers. They have specific cognitive artefacts that don't transfer without specific elicitation tooling.</a:t>
             </a:r>
           </a:p>
         </p:txBody>
@@ -3719,6 +3766,473 @@
 </file>
 
 <file path=ppt/slides/slide14.xml><?xml version="1.0" encoding="utf-8"?>
+<p:sld xmlns:a="http://schemas.openxmlformats.org/drawingml/2006/main" xmlns:p="http://schemas.openxmlformats.org/presentationml/2006/main" xmlns:r="http://schemas.openxmlformats.org/officeDocument/2006/relationships">
+  <p:cSld>
+    <p:spTree>
+      <p:nvGrpSpPr>
+        <p:cNvPr id="1" name=""/>
+        <p:cNvGrpSpPr/>
+        <p:nvPr/>
+      </p:nvGrpSpPr>
+      <p:grpSpPr/>
+      <p:sp>
+        <p:nvSpPr>
+          <p:cNvPr id="2" name="TextBox 1"/>
+          <p:cNvSpPr txBox="1"/>
+          <p:nvPr/>
+        </p:nvSpPr>
+        <p:spPr>
+          <a:xfrm>
+            <a:off x="457200" y="274320"/>
+            <a:ext cx="11247120" cy="914400"/>
+          </a:xfrm>
+          <a:prstGeom prst="rect">
+            <a:avLst/>
+          </a:prstGeom>
+          <a:noFill/>
+        </p:spPr>
+        <p:txBody>
+          <a:bodyPr wrap="square">
+            <a:spAutoFit/>
+          </a:bodyPr>
+          <a:lstStyle/>
+          <a:p>
+            <a:pPr algn="l"/>
+            <a:r>
+              <a:rPr sz="2800" b="1">
+                <a:solidFill>
+                  <a:srgbClr val="1A1A2E"/>
+                </a:solidFill>
+              </a:rPr>
+              <a:t>Eight segments, one engine</a:t>
+            </a:r>
+          </a:p>
+        </p:txBody>
+      </p:sp>
+      <p:sp>
+        <p:nvSpPr>
+          <p:cNvPr id="3" name="TextBox 2"/>
+          <p:cNvSpPr txBox="1"/>
+          <p:nvPr/>
+        </p:nvSpPr>
+        <p:spPr>
+          <a:xfrm>
+            <a:off x="457200" y="1280160"/>
+            <a:ext cx="11247120" cy="5303520"/>
+          </a:xfrm>
+          <a:prstGeom prst="rect">
+            <a:avLst/>
+          </a:prstGeom>
+          <a:noFill/>
+        </p:spPr>
+        <p:txBody>
+          <a:bodyPr wrap="square">
+            <a:spAutoFit/>
+          </a:bodyPr>
+          <a:lstStyle/>
+          <a:p>
+            <a:pPr algn="l">
+              <a:spcAft>
+                <a:spcPts val="800"/>
+              </a:spcAft>
+            </a:pPr>
+            <a:r>
+              <a:rPr sz="1800"/>
+              <a:t>The mechanism set is the same regardless of segment. The surface varies.</a:t>
+            </a:r>
+          </a:p>
+          <a:p>
+            <a:pPr>
+              <a:spcAft>
+                <a:spcPts val="600"/>
+              </a:spcAft>
+            </a:pPr>
+            <a:r>
+              <a:rPr sz="1600"/>
+              <a:t>80% of the global workforce is deskless (~2.7B workers — TalentCards).</a:t>
+            </a:r>
+          </a:p>
+          <a:p>
+            <a:pPr algn="l">
+              <a:spcAft>
+                <a:spcPts val="800"/>
+              </a:spcAft>
+            </a:pPr>
+            <a:r>
+              <a:rPr sz="1800"/>
+              <a:t>The same nano-format unlocks manufacturing, retail, healthcare-frontline, field-services in one shot.</a:t>
+            </a:r>
+          </a:p>
+          <a:p>
+            <a:pPr>
+              <a:spcAft>
+                <a:spcPts val="600"/>
+              </a:spcAft>
+            </a:pPr>
+            <a:r>
+              <a:rPr sz="1600"/>
+              <a:t>**Compliance verticals (finance, healthcare, government) need</a:t>
+            </a:r>
+          </a:p>
+          <a:p>
+            <a:pPr algn="l">
+              <a:spcAft>
+                <a:spcPts val="800"/>
+              </a:spcAft>
+            </a:pPr>
+            <a:r>
+              <a:rPr sz="1800"/>
+              <a:t>audit-trail + version-pin + role-based publish** — same critic engine, different governance gates. &lt;70% completion ⇒ 3.5× violation rate (KPI Depot 2026).</a:t>
+            </a:r>
+          </a:p>
+          <a:p>
+            <a:pPr>
+              <a:spcAft>
+                <a:spcPts val="600"/>
+              </a:spcAft>
+            </a:pPr>
+            <a:r>
+              <a:rPr sz="1600"/>
+              <a:t>High-power-distance markets (East Asia, LATAM, MENA, India) **need</a:t>
+            </a:r>
+          </a:p>
+          <a:p>
+            <a:pPr algn="l">
+              <a:spcAft>
+                <a:spcPts val="800"/>
+              </a:spcAft>
+            </a:pPr>
+            <a:r>
+              <a:rPr sz="1800"/>
+              <a:t>leader-endorsed pathways** — same SME scaffold, different framing.</a:t>
+            </a:r>
+          </a:p>
+          <a:p>
+            <a:pPr>
+              <a:spcAft>
+                <a:spcPts val="600"/>
+              </a:spcAft>
+            </a:pPr>
+            <a:r>
+              <a:rPr sz="1600"/>
+              <a:t>Single-SME-bottleneck SMBs need succession-of-knowledge tooling —</a:t>
+            </a:r>
+          </a:p>
+          <a:p>
+            <a:pPr algn="l">
+              <a:spcAft>
+                <a:spcPts val="800"/>
+              </a:spcAft>
+            </a:pPr>
+            <a:r>
+              <a:rPr sz="1800"/>
+              <a:t>same CTA pipeline, different urgency (bus-factor 1).</a:t>
+            </a:r>
+          </a:p>
+          <a:p>
+            <a:pPr algn="l">
+              <a:spcAft>
+                <a:spcPts val="800"/>
+              </a:spcAft>
+            </a:pPr>
+            <a:r>
+              <a:rPr sz="1800"/>
+              <a:t>One engine, calibrated per segment, not eight rebuilds.</a:t>
+            </a:r>
+          </a:p>
+        </p:txBody>
+      </p:sp>
+    </p:spTree>
+  </p:cSld>
+  <p:clrMapOvr>
+    <a:masterClrMapping/>
+  </p:clrMapOvr>
+</p:sld>
+</file>
+
+<file path=ppt/slides/slide15.xml><?xml version="1.0" encoding="utf-8"?>
+<p:sld xmlns:a="http://schemas.openxmlformats.org/drawingml/2006/main" xmlns:p="http://schemas.openxmlformats.org/presentationml/2006/main" xmlns:r="http://schemas.openxmlformats.org/officeDocument/2006/relationships">
+  <p:cSld>
+    <p:spTree>
+      <p:nvGrpSpPr>
+        <p:cNvPr id="1" name=""/>
+        <p:cNvGrpSpPr/>
+        <p:nvPr/>
+      </p:nvGrpSpPr>
+      <p:grpSpPr/>
+      <p:sp>
+        <p:nvSpPr>
+          <p:cNvPr id="2" name="TextBox 1"/>
+          <p:cNvSpPr txBox="1"/>
+          <p:nvPr/>
+        </p:nvSpPr>
+        <p:spPr>
+          <a:xfrm>
+            <a:off x="457200" y="274320"/>
+            <a:ext cx="11247120" cy="914400"/>
+          </a:xfrm>
+          <a:prstGeom prst="rect">
+            <a:avLst/>
+          </a:prstGeom>
+          <a:noFill/>
+        </p:spPr>
+        <p:txBody>
+          <a:bodyPr wrap="square">
+            <a:spAutoFit/>
+          </a:bodyPr>
+          <a:lstStyle/>
+          <a:p>
+            <a:pPr algn="l"/>
+            <a:r>
+              <a:rPr sz="2800" b="1">
+                <a:solidFill>
+                  <a:srgbClr val="1A1A2E"/>
+                </a:solidFill>
+              </a:rPr>
+              <a:t>What the operator does in Phase 1</a:t>
+            </a:r>
+          </a:p>
+        </p:txBody>
+      </p:sp>
+      <p:sp>
+        <p:nvSpPr>
+          <p:cNvPr id="3" name="TextBox 2"/>
+          <p:cNvSpPr txBox="1"/>
+          <p:nvPr/>
+        </p:nvSpPr>
+        <p:spPr>
+          <a:xfrm>
+            <a:off x="457200" y="1280160"/>
+            <a:ext cx="11247120" cy="5303520"/>
+          </a:xfrm>
+          <a:prstGeom prst="rect">
+            <a:avLst/>
+          </a:prstGeom>
+          <a:noFill/>
+        </p:spPr>
+        <p:txBody>
+          <a:bodyPr wrap="square">
+            <a:spAutoFit/>
+          </a:bodyPr>
+          <a:lstStyle/>
+          <a:p>
+            <a:pPr/>
+            <a:r>
+              <a:rPr sz="1600"/>
+              <a:t>Open Claude Code in the project repo (paid by Max).</a:t>
+            </a:r>
+          </a:p>
+          <a:p>
+            <a:pPr/>
+            <a:r>
+              <a:rPr sz="1600"/>
+              <a:t>Paste a knowledge file (PDF / markdown / slides as text).</a:t>
+            </a:r>
+          </a:p>
+          <a:p>
+            <a:pPr/>
+            <a:r>
+              <a:rPr sz="1600"/>
+              <a:t>Run /draft-topic slash command → Claude drafts JSON.</a:t>
+            </a:r>
+          </a:p>
+          <a:p>
+            <a:pPr/>
+            <a:r>
+              <a:rPr sz="1600"/>
+              <a:t>Local validators run automatically (catch known failure modes).</a:t>
+            </a:r>
+          </a:p>
+          <a:p>
+            <a:pPr>
+              <a:spcAft>
+                <a:spcPts val="600"/>
+              </a:spcAft>
+            </a:pPr>
+            <a:r>
+              <a:rPr sz="1600"/>
+              <a:t>Open admin tool → paste JSON → publish.</a:t>
+            </a:r>
+          </a:p>
+          <a:p>
+            <a:pPr algn="l">
+              <a:spcAft>
+                <a:spcPts val="800"/>
+              </a:spcAft>
+            </a:pPr>
+            <a:r>
+              <a:rPr sz="1800"/>
+              <a:t>~10 minutes per topic.</a:t>
+            </a:r>
+          </a:p>
+        </p:txBody>
+      </p:sp>
+    </p:spTree>
+  </p:cSld>
+  <p:clrMapOvr>
+    <a:masterClrMapping/>
+  </p:clrMapOvr>
+</p:sld>
+</file>
+
+<file path=ppt/slides/slide16.xml><?xml version="1.0" encoding="utf-8"?>
+<p:sld xmlns:a="http://schemas.openxmlformats.org/drawingml/2006/main" xmlns:p="http://schemas.openxmlformats.org/presentationml/2006/main" xmlns:r="http://schemas.openxmlformats.org/officeDocument/2006/relationships">
+  <p:cSld>
+    <p:spTree>
+      <p:nvGrpSpPr>
+        <p:cNvPr id="1" name=""/>
+        <p:cNvGrpSpPr/>
+        <p:nvPr/>
+      </p:nvGrpSpPr>
+      <p:grpSpPr/>
+      <p:sp>
+        <p:nvSpPr>
+          <p:cNvPr id="2" name="TextBox 1"/>
+          <p:cNvSpPr txBox="1"/>
+          <p:nvPr/>
+        </p:nvSpPr>
+        <p:spPr>
+          <a:xfrm>
+            <a:off x="457200" y="274320"/>
+            <a:ext cx="11247120" cy="914400"/>
+          </a:xfrm>
+          <a:prstGeom prst="rect">
+            <a:avLst/>
+          </a:prstGeom>
+          <a:noFill/>
+        </p:spPr>
+        <p:txBody>
+          <a:bodyPr wrap="square">
+            <a:spAutoFit/>
+          </a:bodyPr>
+          <a:lstStyle/>
+          <a:p>
+            <a:pPr algn="l"/>
+            <a:r>
+              <a:rPr sz="2800" b="1">
+                <a:solidFill>
+                  <a:srgbClr val="1A1A2E"/>
+                </a:solidFill>
+              </a:rPr>
+              <a:t>What changes in Phase 2</a:t>
+            </a:r>
+          </a:p>
+        </p:txBody>
+      </p:sp>
+      <p:sp>
+        <p:nvSpPr>
+          <p:cNvPr id="3" name="TextBox 2"/>
+          <p:cNvSpPr txBox="1"/>
+          <p:nvPr/>
+        </p:nvSpPr>
+        <p:spPr>
+          <a:xfrm>
+            <a:off x="457200" y="1280160"/>
+            <a:ext cx="11247120" cy="5303520"/>
+          </a:xfrm>
+          <a:prstGeom prst="rect">
+            <a:avLst/>
+          </a:prstGeom>
+          <a:noFill/>
+        </p:spPr>
+        <p:txBody>
+          <a:bodyPr wrap="square">
+            <a:spAutoFit/>
+          </a:bodyPr>
+          <a:lstStyle/>
+          <a:p>
+            <a:pPr algn="l">
+              <a:spcAft>
+                <a:spcPts val="800"/>
+              </a:spcAft>
+            </a:pPr>
+            <a:r>
+              <a:rPr sz="1800"/>
+              <a:t>Additive on Phase 1, behind feature flags, in this order:</a:t>
+            </a:r>
+          </a:p>
+          <a:p>
+            <a:pPr/>
+            <a:r>
+              <a:rPr sz="1600"/>
+              <a:t>Vercel Pro (TOS compliance for paid customers).</a:t>
+            </a:r>
+          </a:p>
+          <a:p>
+            <a:pPr/>
+            <a:r>
+              <a:rPr sz="1600"/>
+              <a:t>In-app AI generation pipeline (Inngest + Anthropic API).</a:t>
+            </a:r>
+          </a:p>
+          <a:p>
+            <a:pPr/>
+            <a:r>
+              <a:rPr sz="1600"/>
+              <a:t>Opus critiques Sonnet drafts; answer-justification audit.</a:t>
+            </a:r>
+          </a:p>
+          <a:p>
+            <a:pPr/>
+            <a:r>
+              <a:rPr sz="1600"/>
+              <a:t>Confidence routing + sampled spot-checks.</a:t>
+            </a:r>
+          </a:p>
+          <a:p>
+            <a:pPr/>
+            <a:r>
+              <a:rPr sz="1600"/>
+              <a:t>B2B controls: SME role, two-eye gate, per-tenant catalogs.</a:t>
+            </a:r>
+          </a:p>
+          <a:p>
+            <a:pPr/>
+            <a:r>
+              <a:rPr sz="1600"/>
+              <a:t>Stripe billing.</a:t>
+            </a:r>
+          </a:p>
+          <a:p>
+            <a:pPr/>
+            <a:r>
+              <a:rPr sz="1600"/>
+              <a:t>Embedding-based suggestion dedup.</a:t>
+            </a:r>
+          </a:p>
+          <a:p>
+            <a:pPr>
+              <a:spcAft>
+                <a:spcPts val="600"/>
+              </a:spcAft>
+            </a:pPr>
+            <a:r>
+              <a:rPr sz="1600"/>
+              <a:t>Post-publish quality signals → "pause-not-pull".</a:t>
+            </a:r>
+          </a:p>
+          <a:p>
+            <a:pPr algn="l">
+              <a:spcAft>
+                <a:spcPts val="800"/>
+              </a:spcAft>
+            </a:pPr>
+            <a:r>
+              <a:rPr sz="1800"/>
+              <a:t>Nothing from Phase 1 is thrown away.</a:t>
+            </a:r>
+          </a:p>
+        </p:txBody>
+      </p:sp>
+    </p:spTree>
+  </p:cSld>
+  <p:clrMapOvr>
+    <a:masterClrMapping/>
+  </p:clrMapOvr>
+</p:sld>
+</file>
+
+<file path=ppt/slides/slide17.xml><?xml version="1.0" encoding="utf-8"?>
 <p:sld xmlns:a="http://schemas.openxmlformats.org/drawingml/2006/main" xmlns:p="http://schemas.openxmlformats.org/presentationml/2006/main" xmlns:r="http://schemas.openxmlformats.org/officeDocument/2006/relationships">
   <p:cSld>
     <p:spTree>
@@ -4004,7 +4518,7 @@
 </p:sld>
 </file>
 
-<file path=ppt/slides/slide15.xml><?xml version="1.0" encoding="utf-8"?>
+<file path=ppt/slides/slide18.xml><?xml version="1.0" encoding="utf-8"?>
 <p:sld xmlns:a="http://schemas.openxmlformats.org/drawingml/2006/main" xmlns:p="http://schemas.openxmlformats.org/presentationml/2006/main" xmlns:r="http://schemas.openxmlformats.org/officeDocument/2006/relationships">
   <p:cSld>
     <p:spTree>
@@ -4290,7 +4804,7 @@
 </p:sld>
 </file>
 
-<file path=ppt/slides/slide16.xml><?xml version="1.0" encoding="utf-8"?>
+<file path=ppt/slides/slide19.xml><?xml version="1.0" encoding="utf-8"?>
 <p:sld xmlns:a="http://schemas.openxmlformats.org/drawingml/2006/main" xmlns:p="http://schemas.openxmlformats.org/presentationml/2006/main" xmlns:r="http://schemas.openxmlformats.org/officeDocument/2006/relationships">
   <p:cSld>
     <p:spTree>
@@ -4704,7 +5218,7 @@
 </p:sld>
 </file>
 
-<file path=ppt/slides/slide17.xml><?xml version="1.0" encoding="utf-8"?>
+<file path=ppt/slides/slide2.xml><?xml version="1.0" encoding="utf-8"?>
 <p:sld xmlns:a="http://schemas.openxmlformats.org/drawingml/2006/main" xmlns:p="http://schemas.openxmlformats.org/presentationml/2006/main" xmlns:r="http://schemas.openxmlformats.org/officeDocument/2006/relationships">
   <p:cSld>
     <p:spTree>
@@ -4743,7 +5257,7 @@
                   <a:srgbClr val="1A1A2E"/>
                 </a:solidFill>
               </a:rPr>
-              <a:t>What we need to start Phase 1</a:t>
+              <a:t>Content Pack Management Platform</a:t>
             </a:r>
           </a:p>
         </p:txBody>
@@ -4777,25 +5291,7 @@
             </a:pPr>
             <a:r>
               <a:rPr sz="1800"/>
-              <a:t>Sign-off:</a:t>
-            </a:r>
-          </a:p>
-          <a:p>
-            <a:pPr/>
-            <a:r>
-              <a:rPr sz="1600"/>
-              <a:t>The two-phase plan is the right shape.</a:t>
-            </a:r>
-          </a:p>
-          <a:p>
-            <a:pPr>
-              <a:spcAft>
-                <a:spcPts val="600"/>
-              </a:spcAft>
-            </a:pPr>
-            <a:r>
-              <a:rPr sz="1600"/>
-              <a:t>Phase 1 success metric = signed LOIs + pre-orders is the right gate.</a:t>
+              <a:t>A focused learning platform for individuals and companies. Built in two phases — de-risk the AI cost before paying for AI.</a:t>
             </a:r>
           </a:p>
           <a:p>
@@ -4806,50 +5302,7 @@
             </a:pPr>
             <a:r>
               <a:rPr sz="1800"/>
-              <a:t>Resources:</a:t>
-            </a:r>
-          </a:p>
-          <a:p>
-            <a:pPr/>
-            <a:r>
-              <a:rPr sz="1600"/>
-              <a:t>~18 working days of focused build time.</a:t>
-            </a:r>
-          </a:p>
-          <a:p>
-            <a:pPr/>
-            <a:r>
-              <a:rPr sz="1600"/>
-              <a:t>One domain (~$12/yr).</a:t>
-            </a:r>
-          </a:p>
-          <a:p>
-            <a:pPr/>
-            <a:r>
-              <a:rPr sz="1600"/>
-              <a:t>Clerk + Neon + Vercel + R2 + PostHog + Sentry + Resend free-tier accounts.</a:t>
-            </a:r>
-          </a:p>
-          <a:p>
-            <a:pPr>
-              <a:spcAft>
-                <a:spcPts val="600"/>
-              </a:spcAft>
-            </a:pPr>
-            <a:r>
-              <a:rPr sz="1600"/>
-              <a:t>Stripe account (for the pre-order Payment Link).</a:t>
-            </a:r>
-          </a:p>
-          <a:p>
-            <a:pPr algn="l">
-              <a:spcAft>
-                <a:spcPts val="800"/>
-              </a:spcAft>
-            </a:pPr>
-            <a:r>
-              <a:rPr sz="1800"/>
-              <a:t>That's it. Phase 2 spend is gated on Phase 1 evidence.</a:t>
+              <a:t>Branch: claude/content-pack-management-plan-gO7ys</a:t>
             </a:r>
           </a:p>
         </p:txBody>
@@ -4862,7 +5315,7 @@
 </p:sld>
 </file>
 
-<file path=ppt/slides/slide18.xml><?xml version="1.0" encoding="utf-8"?>
+<file path=ppt/slides/slide20.xml><?xml version="1.0" encoding="utf-8"?>
 <p:sld xmlns:a="http://schemas.openxmlformats.org/drawingml/2006/main" xmlns:p="http://schemas.openxmlformats.org/presentationml/2006/main" xmlns:r="http://schemas.openxmlformats.org/officeDocument/2006/relationships">
   <p:cSld>
     <p:spTree>
@@ -4901,7 +5354,7 @@
                   <a:srgbClr val="1A1A2E"/>
                 </a:solidFill>
               </a:rPr>
-              <a:t>In one sentence</a:t>
+              <a:t>What we need to start Phase 1</a:t>
             </a:r>
           </a:p>
         </p:txBody>
@@ -4928,18 +5381,86 @@
           </a:bodyPr>
           <a:lstStyle/>
           <a:p>
+            <a:pPr algn="l">
+              <a:spcAft>
+                <a:spcPts val="800"/>
+              </a:spcAft>
+            </a:pPr>
+            <a:r>
+              <a:rPr sz="1800"/>
+              <a:t>Sign-off:</a:t>
+            </a:r>
+          </a:p>
+          <a:p>
+            <a:pPr/>
+            <a:r>
+              <a:rPr sz="1600"/>
+              <a:t>The two-phase plan is the right shape.</a:t>
+            </a:r>
+          </a:p>
+          <a:p>
             <a:pPr>
               <a:spcAft>
                 <a:spcPts val="600"/>
               </a:spcAft>
             </a:pPr>
             <a:r>
-              <a:rPr sz="1800" i="1">
-                <a:solidFill>
-                  <a:srgbClr val="4A4A6E"/>
-                </a:solidFill>
-              </a:rPr>
-              <a:t>Build a polished delivery platform first, prove people will pay for it using $0/month of infra, and only then turn on the expensive AI generation — with the safety nets (validators, reviewer model, human-in-the-loop) wired in from day one.</a:t>
+              <a:rPr sz="1600"/>
+              <a:t>Phase 1 success metric = signed LOIs + pre-orders is the right gate.</a:t>
+            </a:r>
+          </a:p>
+          <a:p>
+            <a:pPr algn="l">
+              <a:spcAft>
+                <a:spcPts val="800"/>
+              </a:spcAft>
+            </a:pPr>
+            <a:r>
+              <a:rPr sz="1800"/>
+              <a:t>Resources:</a:t>
+            </a:r>
+          </a:p>
+          <a:p>
+            <a:pPr/>
+            <a:r>
+              <a:rPr sz="1600"/>
+              <a:t>~18 working days of focused build time.</a:t>
+            </a:r>
+          </a:p>
+          <a:p>
+            <a:pPr/>
+            <a:r>
+              <a:rPr sz="1600"/>
+              <a:t>One domain (~$12/yr).</a:t>
+            </a:r>
+          </a:p>
+          <a:p>
+            <a:pPr/>
+            <a:r>
+              <a:rPr sz="1600"/>
+              <a:t>Clerk + Neon + Vercel + R2 + PostHog + Sentry + Resend free-tier accounts.</a:t>
+            </a:r>
+          </a:p>
+          <a:p>
+            <a:pPr>
+              <a:spcAft>
+                <a:spcPts val="600"/>
+              </a:spcAft>
+            </a:pPr>
+            <a:r>
+              <a:rPr sz="1600"/>
+              <a:t>Stripe account (for the pre-order Payment Link).</a:t>
+            </a:r>
+          </a:p>
+          <a:p>
+            <a:pPr algn="l">
+              <a:spcAft>
+                <a:spcPts val="800"/>
+              </a:spcAft>
+            </a:pPr>
+            <a:r>
+              <a:rPr sz="1800"/>
+              <a:t>That's it. Phase 2 spend is gated on Phase 1 evidence.</a:t>
             </a:r>
           </a:p>
         </p:txBody>
@@ -4952,7 +5473,7 @@
 </p:sld>
 </file>
 
-<file path=ppt/slides/slide2.xml><?xml version="1.0" encoding="utf-8"?>
+<file path=ppt/slides/slide21.xml><?xml version="1.0" encoding="utf-8"?>
 <p:sld xmlns:a="http://schemas.openxmlformats.org/drawingml/2006/main" xmlns:p="http://schemas.openxmlformats.org/presentationml/2006/main" xmlns:r="http://schemas.openxmlformats.org/officeDocument/2006/relationships">
   <p:cSld>
     <p:spTree>
@@ -4991,7 +5512,7 @@
                   <a:srgbClr val="1A1A2E"/>
                 </a:solidFill>
               </a:rPr>
-              <a:t>Content Pack Management Platform</a:t>
+              <a:t>In one sentence</a:t>
             </a:r>
           </a:p>
         </p:txBody>
@@ -5018,25 +5539,18 @@
           </a:bodyPr>
           <a:lstStyle/>
           <a:p>
-            <a:pPr algn="l">
+            <a:pPr>
               <a:spcAft>
-                <a:spcPts val="800"/>
+                <a:spcPts val="600"/>
               </a:spcAft>
             </a:pPr>
             <a:r>
-              <a:rPr sz="1800"/>
-              <a:t>A focused learning platform for individuals and companies. Built in two phases — de-risk the AI cost before paying for AI.</a:t>
-            </a:r>
-          </a:p>
-          <a:p>
-            <a:pPr algn="l">
-              <a:spcAft>
-                <a:spcPts val="800"/>
-              </a:spcAft>
-            </a:pPr>
-            <a:r>
-              <a:rPr sz="1800"/>
-              <a:t>Branch: claude/content-pack-management-plan-gO7ys</a:t>
+              <a:rPr sz="1800" i="1">
+                <a:solidFill>
+                  <a:srgbClr val="4A4A6E"/>
+                </a:solidFill>
+              </a:rPr>
+              <a:t>Build a polished delivery platform first, prove people will pay for it using $0/month of infra, and only then turn on the expensive AI generation — with the safety nets (validators, reviewer model, human-in-the-loop) wired in from day one.</a:t>
             </a:r>
           </a:p>
         </p:txBody>

--- a/plans/deck-overview.pptx
+++ b/plans/deck-overview.pptx
@@ -26,6 +26,7 @@
     <p:sldId id="274" r:id="rId25"/>
     <p:sldId id="275" r:id="rId26"/>
     <p:sldId id="276" r:id="rId27"/>
+    <p:sldId id="277" r:id="rId28"/>
   </p:sldIdLst>
   <p:sldSz cx="12191695" cy="6858000" type="screen4x3"/>
   <p:notesSz cx="6858000" cy="9144000"/>
@@ -3804,7 +3805,7 @@
                   <a:srgbClr val="1A1A2E"/>
                 </a:solidFill>
               </a:rPr>
-              <a:t>Eight segments, one engine</a:t>
+              <a:t>Problems we mitigate, and how</a:t>
             </a:r>
           </a:p>
         </p:txBody>
@@ -3838,18 +3839,7 @@
             </a:pPr>
             <a:r>
               <a:rPr sz="1800"/>
-              <a:t>The mechanism set is the same regardless of segment. The surface varies.</a:t>
-            </a:r>
-          </a:p>
-          <a:p>
-            <a:pPr>
-              <a:spcAft>
-                <a:spcPts val="600"/>
-              </a:spcAft>
-            </a:pPr>
-            <a:r>
-              <a:rPr sz="1600"/>
-              <a:t>80% of the global workforce is deskless (~2.7B workers — TalentCards).</a:t>
+              <a:t>The chain reads left-to-right: identified problem → specific feature in the platform → research source. Same matrix elaborated in content-pack-management-plan.md §D0 and mirrored in every deck.</a:t>
             </a:r>
           </a:p>
           <a:p>
@@ -3860,18 +3850,7 @@
             </a:pPr>
             <a:r>
               <a:rPr sz="1800"/>
-              <a:t>The same nano-format unlocks manufacturing, retail, healthcare-frontline, field-services in one shot.</a:t>
-            </a:r>
-          </a:p>
-          <a:p>
-            <a:pPr>
-              <a:spcAft>
-                <a:spcPts val="600"/>
-              </a:spcAft>
-            </a:pPr>
-            <a:r>
-              <a:rPr sz="1600"/>
-              <a:t>**Compliance verticals (finance, healthcare, government) need</a:t>
+              <a:t>Learner retention + absorption:</a:t>
             </a:r>
           </a:p>
           <a:p>
@@ -3882,18 +3861,7 @@
             </a:pPr>
             <a:r>
               <a:rPr sz="1800"/>
-              <a:t>audit-trail + version-pin + role-based publish** — same critic engine, different governance gates. &lt;70% completion ⇒ 3.5× violation rate (KPI Depot 2026).</a:t>
-            </a:r>
-          </a:p>
-          <a:p>
-            <a:pPr>
-              <a:spcAft>
-                <a:spcPts val="600"/>
-              </a:spcAft>
-            </a:pPr>
-            <a:r>
-              <a:rPr sz="1600"/>
-              <a:t>High-power-distance markets (East Asia, LATAM, MENA, India) **need</a:t>
+              <a:t>SME knowledge-sharing:</a:t>
             </a:r>
           </a:p>
           <a:p>
@@ -3904,44 +3872,646 @@
             </a:pPr>
             <a:r>
               <a:rPr sz="1800"/>
-              <a:t>leader-endorsed pathways** — same SME scaffold, different framing.</a:t>
-            </a:r>
-          </a:p>
-          <a:p>
-            <a:pPr>
-              <a:spcAft>
-                <a:spcPts val="600"/>
-              </a:spcAft>
-            </a:pPr>
-            <a:r>
-              <a:rPr sz="1600"/>
-              <a:t>Single-SME-bottleneck SMBs need succession-of-knowledge tooling —</a:t>
-            </a:r>
-          </a:p>
-          <a:p>
-            <a:pPr algn="l">
-              <a:spcAft>
-                <a:spcPts val="800"/>
-              </a:spcAft>
-            </a:pPr>
-            <a:r>
-              <a:rPr sz="1800"/>
-              <a:t>same CTA pipeline, different urgency (bus-factor 1).</a:t>
-            </a:r>
-          </a:p>
-          <a:p>
-            <a:pPr algn="l">
-              <a:spcAft>
-                <a:spcPts val="800"/>
-              </a:spcAft>
-            </a:pPr>
-            <a:r>
-              <a:rPr sz="1800"/>
-              <a:t>One engine, calibrated per segment, not eight rebuilds.</a:t>
-            </a:r>
-          </a:p>
-        </p:txBody>
-      </p:sp>
+              <a:t>Every mitigation is a shipped Phase-2 surface — not exhortation, not a "best-practice guideline." Outcome targets per Kirkpatrick L1–L4 in content-pack-management-plan.md §D4.</a:t>
+            </a:r>
+          </a:p>
+        </p:txBody>
+      </p:sp>
+      <p:graphicFrame>
+        <p:nvGraphicFramePr>
+          <p:cNvPr id="4" name="Table 3"/>
+          <p:cNvGraphicFramePr>
+            <a:graphicFrameLocks noGrp="1"/>
+          </p:cNvGraphicFramePr>
+          <p:nvPr/>
+        </p:nvGraphicFramePr>
+        <p:xfrm>
+          <a:off x="457200" y="2651760"/>
+          <a:ext cx="11247120" cy="2880360"/>
+        </p:xfrm>
+        <a:graphic>
+          <a:graphicData uri="http://schemas.openxmlformats.org/drawingml/2006/table">
+            <a:tbl>
+              <a:tblPr firstRow="1" bandRow="1">
+                <a:tableStyleId>{5C22544A-7EE6-4342-B048-85BDC9FD1C3A}</a:tableStyleId>
+              </a:tblPr>
+              <a:tblGrid>
+                <a:gridCol w="3749040"/>
+                <a:gridCol w="3749040"/>
+                <a:gridCol w="3749040"/>
+              </a:tblGrid>
+              <a:tr h="411480">
+                <a:tc>
+                  <a:txBody>
+                    <a:bodyPr/>
+                    <a:lstStyle/>
+                    <a:p>
+                      <a:r>
+                        <a:rPr sz="1100" b="1">
+                          <a:solidFill>
+                            <a:srgbClr val="FFFFFF"/>
+                          </a:solidFill>
+                        </a:rPr>
+                        <a:t>Problem</a:t>
+                      </a:r>
+                    </a:p>
+                  </a:txBody>
+                  <a:tcPr>
+                    <a:solidFill>
+                      <a:srgbClr val="1A1A2E"/>
+                    </a:solidFill>
+                  </a:tcPr>
+                </a:tc>
+                <a:tc>
+                  <a:txBody>
+                    <a:bodyPr/>
+                    <a:lstStyle/>
+                    <a:p>
+                      <a:r>
+                        <a:rPr sz="1100" b="1">
+                          <a:solidFill>
+                            <a:srgbClr val="FFFFFF"/>
+                          </a:solidFill>
+                        </a:rPr>
+                        <a:t>Platform feature</a:t>
+                      </a:r>
+                    </a:p>
+                  </a:txBody>
+                  <a:tcPr>
+                    <a:solidFill>
+                      <a:srgbClr val="1A1A2E"/>
+                    </a:solidFill>
+                  </a:tcPr>
+                </a:tc>
+                <a:tc>
+                  <a:txBody>
+                    <a:bodyPr/>
+                    <a:lstStyle/>
+                    <a:p>
+                      <a:r>
+                        <a:rPr sz="1100" b="1">
+                          <a:solidFill>
+                            <a:srgbClr val="FFFFFF"/>
+                          </a:solidFill>
+                        </a:rPr>
+                        <a:t>Source</a:t>
+                      </a:r>
+                    </a:p>
+                  </a:txBody>
+                  <a:tcPr>
+                    <a:solidFill>
+                      <a:srgbClr val="1A1A2E"/>
+                    </a:solidFill>
+                  </a:tcPr>
+                </a:tc>
+              </a:tr>
+              <a:tr h="411480">
+                <a:tc>
+                  <a:txBody>
+                    <a:bodyPr/>
+                    <a:lstStyle/>
+                    <a:p>
+                      <a:r>
+                        <a:rPr sz="1100"/>
+                        <a:t>~25% knowledge retained at day 6 without review</a:t>
+                      </a:r>
+                    </a:p>
+                  </a:txBody>
+                  <a:tcPr/>
+                </a:tc>
+                <a:tc>
+                  <a:txBody>
+                    <a:bodyPr/>
+                    <a:lstStyle/>
+                    <a:p>
+                      <a:r>
+                        <a:rPr sz="1100"/>
+                        <a:t>Spaced-review banner on the dashboard with one-tap "Start review"; expanding interval 1/3/7/14/30d</a:t>
+                      </a:r>
+                    </a:p>
+                  </a:txBody>
+                  <a:tcPr/>
+                </a:tc>
+                <a:tc>
+                  <a:txBody>
+                    <a:bodyPr/>
+                    <a:lstStyle/>
+                    <a:p>
+                      <a:r>
+                        <a:rPr sz="1100"/>
+                        <a:t>Cepeda 2008; Murre &amp; Dros 2015</a:t>
+                      </a:r>
+                    </a:p>
+                  </a:txBody>
+                  <a:tcPr/>
+                </a:tc>
+              </a:tr>
+              <a:tr h="411480">
+                <a:tc>
+                  <a:txBody>
+                    <a:bodyPr/>
+                    <a:lstStyle/>
+                    <a:p>
+                      <a:r>
+                        <a:rPr sz="1100"/>
+                        <a:t>Streaks computed but no return-trigger</a:t>
+                      </a:r>
+                    </a:p>
+                  </a:txBody>
+                  <a:tcPr/>
+                </a:tc>
+                <a:tc>
+                  <a:txBody>
+                    <a:bodyPr/>
+                    <a:lstStyle/>
+                    <a:p>
+                      <a:r>
+                        <a:rPr sz="1100"/>
+                        <a:t>Streak counter + web-push at user's modal study-time; streak-freeze</a:t>
+                      </a:r>
+                    </a:p>
+                  </a:txBody>
+                  <a:tcPr/>
+                </a:tc>
+                <a:tc>
+                  <a:txBody>
+                    <a:bodyPr/>
+                    <a:lstStyle/>
+                    <a:p>
+                      <a:r>
+                        <a:rPr sz="1100"/>
+                        <a:t>Eyal 2014; Mazal 2022 (Duolingo CURR +21%)</a:t>
+                      </a:r>
+                    </a:p>
+                  </a:txBody>
+                  <a:tcPr/>
+                </a:tc>
+              </a:tr>
+              <a:tr h="411480">
+                <a:tc>
+                  <a:txBody>
+                    <a:bodyPr/>
+                    <a:lstStyle/>
+                    <a:p>
+                      <a:r>
+                        <a:rPr sz="1100"/>
+                        <a:t>Re-reading produces fluency illusion, not learning</a:t>
+                      </a:r>
+                    </a:p>
+                  </a:txBody>
+                  <a:tcPr/>
+                </a:tc>
+                <a:tc>
+                  <a:txBody>
+                    <a:bodyPr/>
+                    <a:lstStyle/>
+                    <a:p>
+                      <a:r>
+                        <a:rPr sz="1100"/>
+                        <a:t>Mid-lesson retrieval gate (recall before reveal); write-the-principle field</a:t>
+                      </a:r>
+                    </a:p>
+                  </a:txBody>
+                  <a:tcPr/>
+                </a:tc>
+                <a:tc>
+                  <a:txBody>
+                    <a:bodyPr/>
+                    <a:lstStyle/>
+                    <a:p>
+                      <a:r>
+                        <a:rPr sz="1100"/>
+                        <a:t>Roediger &amp; Karpicke 2006; Slamecka &amp; Graf 1978</a:t>
+                      </a:r>
+                    </a:p>
+                  </a:txBody>
+                  <a:tcPr/>
+                </a:tc>
+              </a:tr>
+              <a:tr h="411480">
+                <a:tc>
+                  <a:txBody>
+                    <a:bodyPr/>
+                    <a:lstStyle/>
+                    <a:p>
+                      <a:r>
+                        <a:rPr sz="1100"/>
+                        <a:t>No metacognitive calibration capture</a:t>
+                      </a:r>
+                    </a:p>
+                  </a:txBody>
+                  <a:tcPr/>
+                </a:tc>
+                <a:tc>
+                  <a:txBody>
+                    <a:bodyPr/>
+                    <a:lstStyle/>
+                    <a:p>
+                      <a:r>
+                        <a:rPr sz="1100"/>
+                        <a:t>JOL slider before reveal; calibration-Δ trend visible</a:t>
+                      </a:r>
+                    </a:p>
+                  </a:txBody>
+                  <a:tcPr/>
+                </a:tc>
+                <a:tc>
+                  <a:txBody>
+                    <a:bodyPr/>
+                    <a:lstStyle/>
+                    <a:p>
+                      <a:r>
+                        <a:rPr sz="1100"/>
+                        <a:t>Dunlosky &amp; Bjork; Kruger &amp; Dunning 1999</a:t>
+                      </a:r>
+                    </a:p>
+                  </a:txBody>
+                  <a:tcPr/>
+                </a:tc>
+              </a:tr>
+              <a:tr h="411480">
+                <a:tc>
+                  <a:txBody>
+                    <a:bodyPr/>
+                    <a:lstStyle/>
+                    <a:p>
+                      <a:r>
+                        <a:rPr sz="1100"/>
+                        <a:t>Blocked practice transfers ~30% worse</a:t>
+                      </a:r>
+                    </a:p>
+                  </a:txBody>
+                  <a:tcPr/>
+                </a:tc>
+                <a:tc>
+                  <a:txBody>
+                    <a:bodyPr/>
+                    <a:lstStyle/>
+                    <a:p>
+                      <a:r>
+                        <a:rPr sz="1100"/>
+                        <a:t>Recommender enforces sub-area rotation per session</a:t>
+                      </a:r>
+                    </a:p>
+                  </a:txBody>
+                  <a:tcPr/>
+                </a:tc>
+                <a:tc>
+                  <a:txBody>
+                    <a:bodyPr/>
+                    <a:lstStyle/>
+                    <a:p>
+                      <a:r>
+                        <a:rPr sz="1100"/>
+                        <a:t>Rohrer &amp; Taylor 2007</a:t>
+                      </a:r>
+                    </a:p>
+                  </a:txBody>
+                  <a:tcPr/>
+                </a:tc>
+              </a:tr>
+              <a:tr h="411480">
+                <a:tc>
+                  <a:txBody>
+                    <a:bodyPr/>
+                    <a:lstStyle/>
+                    <a:p>
+                      <a:r>
+                        <a:rPr sz="1100"/>
+                        <a:t>No social/cohort surface; SDT relatedness unmet</a:t>
+                      </a:r>
+                    </a:p>
+                  </a:txBody>
+                  <a:tcPr/>
+                </a:tc>
+                <a:tc>
+                  <a:txBody>
+                    <a:bodyPr/>
+                    <a:lstStyle/>
+                    <a:p>
+                      <a:r>
+                        <a:rPr sz="1100"/>
+                        <a:t>Per-cohort routes + peer-comparison + group leaderboard</a:t>
+                      </a:r>
+                    </a:p>
+                  </a:txBody>
+                  <a:tcPr/>
+                </a:tc>
+                <a:tc>
+                  <a:txBody>
+                    <a:bodyPr/>
+                    <a:lstStyle/>
+                    <a:p>
+                      <a:r>
+                        <a:rPr sz="1100"/>
+                        <a:t>Ryan &amp; Deci; Maven 96% vs MOOC 16%</a:t>
+                      </a:r>
+                    </a:p>
+                  </a:txBody>
+                  <a:tcPr/>
+                </a:tc>
+              </a:tr>
+            </a:tbl>
+          </a:graphicData>
+        </a:graphic>
+      </p:graphicFrame>
+      <p:graphicFrame>
+        <p:nvGraphicFramePr>
+          <p:cNvPr id="5" name="Table 4"/>
+          <p:cNvGraphicFramePr>
+            <a:graphicFrameLocks noGrp="1"/>
+          </p:cNvGraphicFramePr>
+          <p:nvPr/>
+        </p:nvGraphicFramePr>
+        <p:xfrm>
+          <a:off x="457200" y="3474720"/>
+          <a:ext cx="11247120" cy="2468880"/>
+        </p:xfrm>
+        <a:graphic>
+          <a:graphicData uri="http://schemas.openxmlformats.org/drawingml/2006/table">
+            <a:tbl>
+              <a:tblPr firstRow="1" bandRow="1">
+                <a:tableStyleId>{5C22544A-7EE6-4342-B048-85BDC9FD1C3A}</a:tableStyleId>
+              </a:tblPr>
+              <a:tblGrid>
+                <a:gridCol w="3749040"/>
+                <a:gridCol w="3749040"/>
+                <a:gridCol w="3749040"/>
+              </a:tblGrid>
+              <a:tr h="411480">
+                <a:tc>
+                  <a:txBody>
+                    <a:bodyPr/>
+                    <a:lstStyle/>
+                    <a:p>
+                      <a:r>
+                        <a:rPr sz="1100" b="1">
+                          <a:solidFill>
+                            <a:srgbClr val="FFFFFF"/>
+                          </a:solidFill>
+                        </a:rPr>
+                        <a:t>Problem</a:t>
+                      </a:r>
+                    </a:p>
+                  </a:txBody>
+                  <a:tcPr>
+                    <a:solidFill>
+                      <a:srgbClr val="1A1A2E"/>
+                    </a:solidFill>
+                  </a:tcPr>
+                </a:tc>
+                <a:tc>
+                  <a:txBody>
+                    <a:bodyPr/>
+                    <a:lstStyle/>
+                    <a:p>
+                      <a:r>
+                        <a:rPr sz="1100" b="1">
+                          <a:solidFill>
+                            <a:srgbClr val="FFFFFF"/>
+                          </a:solidFill>
+                        </a:rPr>
+                        <a:t>Platform feature</a:t>
+                      </a:r>
+                    </a:p>
+                  </a:txBody>
+                  <a:tcPr>
+                    <a:solidFill>
+                      <a:srgbClr val="1A1A2E"/>
+                    </a:solidFill>
+                  </a:tcPr>
+                </a:tc>
+                <a:tc>
+                  <a:txBody>
+                    <a:bodyPr/>
+                    <a:lstStyle/>
+                    <a:p>
+                      <a:r>
+                        <a:rPr sz="1100" b="1">
+                          <a:solidFill>
+                            <a:srgbClr val="FFFFFF"/>
+                          </a:solidFill>
+                        </a:rPr>
+                        <a:t>Source</a:t>
+                      </a:r>
+                    </a:p>
+                  </a:txBody>
+                  <a:tcPr>
+                    <a:solidFill>
+                      <a:srgbClr val="1A1A2E"/>
+                    </a:solidFill>
+                  </a:tcPr>
+                </a:tc>
+              </a:tr>
+              <a:tr h="411480">
+                <a:tc>
+                  <a:txBody>
+                    <a:bodyPr/>
+                    <a:lstStyle/>
+                    <a:p>
+                      <a:r>
+                        <a:rPr sz="1100"/>
+                        <a:t>SMEs omit ~70% of decisions when self-narrating</a:t>
+                      </a:r>
+                    </a:p>
+                  </a:txBody>
+                  <a:tcPr/>
+                </a:tc>
+                <a:tc>
+                  <a:txBody>
+                    <a:bodyPr/>
+                    <a:lstStyle/>
+                    <a:p>
+                      <a:r>
+                        <a:rPr sz="1100"/>
+                        <a:t>5-probe DrafterIntake schema with required JSON fields</a:t>
+                      </a:r>
+                    </a:p>
+                  </a:txBody>
+                  <a:tcPr/>
+                </a:tc>
+                <a:tc>
+                  <a:txBody>
+                    <a:bodyPr/>
+                    <a:lstStyle/>
+                    <a:p>
+                      <a:r>
+                        <a:rPr sz="1100"/>
+                        <a:t>Clark / Feldon; Lee 2004 (+46% gain, d ≈ 1.72)</a:t>
+                      </a:r>
+                    </a:p>
+                  </a:txBody>
+                  <a:tcPr/>
+                </a:tc>
+              </a:tr>
+              <a:tr h="411480">
+                <a:tc>
+                  <a:txBody>
+                    <a:bodyPr/>
+                    <a:lstStyle/>
+                    <a:p>
+                      <a:r>
+                        <a:rPr sz="1100"/>
+                        <a:t>"Telling what I know" instead of designing toward an assessment</a:t>
+                      </a:r>
+                    </a:p>
+                  </a:txBody>
+                  <a:tcPr/>
+                </a:tc>
+                <a:tc>
+                  <a:txBody>
+                    <a:bodyPr/>
+                    <a:lstStyle/>
+                    <a:p>
+                      <a:r>
+                        <a:rPr sz="1100"/>
+                        <a:t>Backward-design "write the test first" mode; lesson editor locked until assessment authored</a:t>
+                      </a:r>
+                    </a:p>
+                  </a:txBody>
+                  <a:tcPr/>
+                </a:tc>
+                <a:tc>
+                  <a:txBody>
+                    <a:bodyPr/>
+                    <a:lstStyle/>
+                    <a:p>
+                      <a:r>
+                        <a:rPr sz="1100"/>
+                        <a:t>Wiggins &amp; McTighe 1998</a:t>
+                      </a:r>
+                    </a:p>
+                  </a:txBody>
+                  <a:tcPr/>
+                </a:tc>
+              </a:tr>
+              <a:tr h="411480">
+                <a:tc>
+                  <a:txBody>
+                    <a:bodyPr/>
+                    <a:lstStyle/>
+                    <a:p>
+                      <a:r>
+                        <a:rPr sz="1100"/>
+                        <a:t>Curse of expertise — under-explained bridging steps</a:t>
+                      </a:r>
+                    </a:p>
+                  </a:txBody>
+                  <a:tcPr/>
+                </a:tc>
+                <a:tc>
+                  <a:txBody>
+                    <a:bodyPr/>
+                    <a:lstStyle/>
+                    <a:p>
+                      <a:r>
+                        <a:rPr sz="1100"/>
+                        <a:t>"What would a novice get wrong?" probe required at submission</a:t>
+                      </a:r>
+                    </a:p>
+                  </a:txBody>
+                  <a:tcPr/>
+                </a:tc>
+                <a:tc>
+                  <a:txBody>
+                    <a:bodyPr/>
+                    <a:lstStyle/>
+                    <a:p>
+                      <a:r>
+                        <a:rPr sz="1100"/>
+                        <a:t>Nathan &amp; Petrosino 2003</a:t>
+                      </a:r>
+                    </a:p>
+                  </a:txBody>
+                  <a:tcPr/>
+                </a:tc>
+              </a:tr>
+              <a:tr h="411480">
+                <a:tc>
+                  <a:txBody>
+                    <a:bodyPr/>
+                    <a:lstStyle/>
+                    <a:p>
+                      <a:r>
+                        <a:rPr sz="1100"/>
+                        <a:t>Tacit knowledge unrecoverable from text-from-blank</a:t>
+                      </a:r>
+                    </a:p>
+                  </a:txBody>
+                  <a:tcPr/>
+                </a:tc>
+                <a:tc>
+                  <a:txBody>
+                    <a:bodyPr/>
+                    <a:lstStyle/>
+                    <a:p>
+                      <a:r>
+                        <a:rPr sz="1100"/>
+                        <a:t>Voice-first / camera-first authoring with auto-draft</a:t>
+                      </a:r>
+                    </a:p>
+                  </a:txBody>
+                  <a:tcPr/>
+                </a:tc>
+                <a:tc>
+                  <a:txBody>
+                    <a:bodyPr/>
+                    <a:lstStyle/>
+                    <a:p>
+                      <a:r>
+                        <a:rPr sz="1100"/>
+                        <a:t>Polanyi 1966; CTA-for-skilled-trades</a:t>
+                      </a:r>
+                    </a:p>
+                  </a:txBody>
+                  <a:tcPr/>
+                </a:tc>
+              </a:tr>
+              <a:tr h="411480">
+                <a:tc>
+                  <a:txBody>
+                    <a:bodyPr/>
+                    <a:lstStyle/>
+                    <a:p>
+                      <a:r>
+                        <a:rPr sz="1100"/>
+                        <a:t>Critic feedback is destination, not loop</a:t>
+                      </a:r>
+                    </a:p>
+                  </a:txBody>
+                  <a:tcPr/>
+                </a:tc>
+                <a:tc>
+                  <a:txBody>
+                    <a:bodyPr/>
+                    <a:lstStyle/>
+                    <a:p>
+                      <a:r>
+                        <a:rPr sz="1100"/>
+                        <a:t>Per-SME blind-spot dashboard aggregating feedback over time</a:t>
+                      </a:r>
+                    </a:p>
+                  </a:txBody>
+                  <a:tcPr/>
+                </a:tc>
+                <a:tc>
+                  <a:txBody>
+                    <a:bodyPr/>
+                    <a:lstStyle/>
+                    <a:p>
+                      <a:r>
+                        <a:rPr sz="1100"/>
+                        <a:t>Ericsson 1993 (deliberate-practice feedback channel)</a:t>
+                      </a:r>
+                    </a:p>
+                  </a:txBody>
+                  <a:tcPr/>
+                </a:tc>
+              </a:tr>
+            </a:tbl>
+          </a:graphicData>
+        </a:graphic>
+      </p:graphicFrame>
     </p:spTree>
   </p:cSld>
   <p:clrMapOvr>
@@ -3989,7 +4559,7 @@
                   <a:srgbClr val="1A1A2E"/>
                 </a:solidFill>
               </a:rPr>
-              <a:t>What the operator does in Phase 1</a:t>
+              <a:t>Eight segments, one engine</a:t>
             </a:r>
           </a:p>
         </p:txBody>
@@ -4016,31 +4586,14 @@
           </a:bodyPr>
           <a:lstStyle/>
           <a:p>
-            <a:pPr/>
-            <a:r>
-              <a:rPr sz="1600"/>
-              <a:t>Open Claude Code in the project repo (paid by Max).</a:t>
-            </a:r>
-          </a:p>
-          <a:p>
-            <a:pPr/>
-            <a:r>
-              <a:rPr sz="1600"/>
-              <a:t>Paste a knowledge file (PDF / markdown / slides as text).</a:t>
-            </a:r>
-          </a:p>
-          <a:p>
-            <a:pPr/>
-            <a:r>
-              <a:rPr sz="1600"/>
-              <a:t>Run /draft-topic slash command → Claude drafts JSON.</a:t>
-            </a:r>
-          </a:p>
-          <a:p>
-            <a:pPr/>
-            <a:r>
-              <a:rPr sz="1600"/>
-              <a:t>Local validators run automatically (catch known failure modes).</a:t>
+            <a:pPr algn="l">
+              <a:spcAft>
+                <a:spcPts val="800"/>
+              </a:spcAft>
+            </a:pPr>
+            <a:r>
+              <a:rPr sz="1800"/>
+              <a:t>The mechanism set is the same regardless of segment. The surface varies.</a:t>
             </a:r>
           </a:p>
           <a:p>
@@ -4051,7 +4604,7 @@
             </a:pPr>
             <a:r>
               <a:rPr sz="1600"/>
-              <a:t>Open admin tool → paste JSON → publish.</a:t>
+              <a:t>80% of the global workforce is deskless (~2.7B workers — TalentCards).</a:t>
             </a:r>
           </a:p>
           <a:p>
@@ -4062,7 +4615,84 @@
             </a:pPr>
             <a:r>
               <a:rPr sz="1800"/>
-              <a:t>~10 minutes per topic.</a:t>
+              <a:t>The same nano-format unlocks manufacturing, retail, healthcare-frontline, field-services in one shot.</a:t>
+            </a:r>
+          </a:p>
+          <a:p>
+            <a:pPr>
+              <a:spcAft>
+                <a:spcPts val="600"/>
+              </a:spcAft>
+            </a:pPr>
+            <a:r>
+              <a:rPr sz="1600"/>
+              <a:t>**Compliance verticals (finance, healthcare, government) need</a:t>
+            </a:r>
+          </a:p>
+          <a:p>
+            <a:pPr algn="l">
+              <a:spcAft>
+                <a:spcPts val="800"/>
+              </a:spcAft>
+            </a:pPr>
+            <a:r>
+              <a:rPr sz="1800"/>
+              <a:t>audit-trail + version-pin + role-based publish** — same critic engine, different governance gates. &lt;70% completion ⇒ 3.5× violation rate (KPI Depot 2026).</a:t>
+            </a:r>
+          </a:p>
+          <a:p>
+            <a:pPr>
+              <a:spcAft>
+                <a:spcPts val="600"/>
+              </a:spcAft>
+            </a:pPr>
+            <a:r>
+              <a:rPr sz="1600"/>
+              <a:t>High-power-distance markets (East Asia, LATAM, MENA, India) **need</a:t>
+            </a:r>
+          </a:p>
+          <a:p>
+            <a:pPr algn="l">
+              <a:spcAft>
+                <a:spcPts val="800"/>
+              </a:spcAft>
+            </a:pPr>
+            <a:r>
+              <a:rPr sz="1800"/>
+              <a:t>leader-endorsed pathways** — same SME scaffold, different framing.</a:t>
+            </a:r>
+          </a:p>
+          <a:p>
+            <a:pPr>
+              <a:spcAft>
+                <a:spcPts val="600"/>
+              </a:spcAft>
+            </a:pPr>
+            <a:r>
+              <a:rPr sz="1600"/>
+              <a:t>Single-SME-bottleneck SMBs need succession-of-knowledge tooling —</a:t>
+            </a:r>
+          </a:p>
+          <a:p>
+            <a:pPr algn="l">
+              <a:spcAft>
+                <a:spcPts val="800"/>
+              </a:spcAft>
+            </a:pPr>
+            <a:r>
+              <a:rPr sz="1800"/>
+              <a:t>same CTA pipeline, different urgency (bus-factor 1).</a:t>
+            </a:r>
+          </a:p>
+          <a:p>
+            <a:pPr algn="l">
+              <a:spcAft>
+                <a:spcPts val="800"/>
+              </a:spcAft>
+            </a:pPr>
+            <a:r>
+              <a:rPr sz="1800"/>
+              <a:t>One engine, calibrated per segment, not eight rebuilds.</a:t>
             </a:r>
           </a:p>
         </p:txBody>
@@ -4114,7 +4744,7 @@
                   <a:srgbClr val="1A1A2E"/>
                 </a:solidFill>
               </a:rPr>
-              <a:t>What changes in Phase 2</a:t>
+              <a:t>What the operator does in Phase 1</a:t>
             </a:r>
           </a:p>
         </p:txBody>
@@ -4141,6 +4771,45 @@
           </a:bodyPr>
           <a:lstStyle/>
           <a:p>
+            <a:pPr/>
+            <a:r>
+              <a:rPr sz="1600"/>
+              <a:t>Open Claude Code in the project repo (paid by Max).</a:t>
+            </a:r>
+          </a:p>
+          <a:p>
+            <a:pPr/>
+            <a:r>
+              <a:rPr sz="1600"/>
+              <a:t>Paste a knowledge file (PDF / markdown / slides as text).</a:t>
+            </a:r>
+          </a:p>
+          <a:p>
+            <a:pPr/>
+            <a:r>
+              <a:rPr sz="1600"/>
+              <a:t>Run /draft-topic slash command → Claude drafts JSON.</a:t>
+            </a:r>
+          </a:p>
+          <a:p>
+            <a:pPr/>
+            <a:r>
+              <a:rPr sz="1600"/>
+              <a:t>Local validators run automatically (catch known failure modes).</a:t>
+            </a:r>
+          </a:p>
+          <a:p>
+            <a:pPr>
+              <a:spcAft>
+                <a:spcPts val="600"/>
+              </a:spcAft>
+            </a:pPr>
+            <a:r>
+              <a:rPr sz="1600"/>
+              <a:t>Open admin tool → paste JSON → publish.</a:t>
+            </a:r>
+          </a:p>
+          <a:p>
             <a:pPr algn="l">
               <a:spcAft>
                 <a:spcPts val="800"/>
@@ -4148,78 +4817,7 @@
             </a:pPr>
             <a:r>
               <a:rPr sz="1800"/>
-              <a:t>Additive on Phase 1, behind feature flags, in this order:</a:t>
-            </a:r>
-          </a:p>
-          <a:p>
-            <a:pPr/>
-            <a:r>
-              <a:rPr sz="1600"/>
-              <a:t>Vercel Pro (TOS compliance for paid customers).</a:t>
-            </a:r>
-          </a:p>
-          <a:p>
-            <a:pPr/>
-            <a:r>
-              <a:rPr sz="1600"/>
-              <a:t>In-app AI generation pipeline (Inngest + Anthropic API).</a:t>
-            </a:r>
-          </a:p>
-          <a:p>
-            <a:pPr/>
-            <a:r>
-              <a:rPr sz="1600"/>
-              <a:t>Opus critiques Sonnet drafts; answer-justification audit.</a:t>
-            </a:r>
-          </a:p>
-          <a:p>
-            <a:pPr/>
-            <a:r>
-              <a:rPr sz="1600"/>
-              <a:t>Confidence routing + sampled spot-checks.</a:t>
-            </a:r>
-          </a:p>
-          <a:p>
-            <a:pPr/>
-            <a:r>
-              <a:rPr sz="1600"/>
-              <a:t>B2B controls: SME role, two-eye gate, per-tenant catalogs.</a:t>
-            </a:r>
-          </a:p>
-          <a:p>
-            <a:pPr/>
-            <a:r>
-              <a:rPr sz="1600"/>
-              <a:t>Stripe billing.</a:t>
-            </a:r>
-          </a:p>
-          <a:p>
-            <a:pPr/>
-            <a:r>
-              <a:rPr sz="1600"/>
-              <a:t>Embedding-based suggestion dedup.</a:t>
-            </a:r>
-          </a:p>
-          <a:p>
-            <a:pPr>
-              <a:spcAft>
-                <a:spcPts val="600"/>
-              </a:spcAft>
-            </a:pPr>
-            <a:r>
-              <a:rPr sz="1600"/>
-              <a:t>Post-publish quality signals → "pause-not-pull".</a:t>
-            </a:r>
-          </a:p>
-          <a:p>
-            <a:pPr algn="l">
-              <a:spcAft>
-                <a:spcPts val="800"/>
-              </a:spcAft>
-            </a:pPr>
-            <a:r>
-              <a:rPr sz="1800"/>
-              <a:t>Nothing from Phase 1 is thrown away.</a:t>
+              <a:t>~10 minutes per topic.</a:t>
             </a:r>
           </a:p>
         </p:txBody>
@@ -4233,6 +4831,163 @@
 </file>
 
 <file path=ppt/slides/slide17.xml><?xml version="1.0" encoding="utf-8"?>
+<p:sld xmlns:a="http://schemas.openxmlformats.org/drawingml/2006/main" xmlns:p="http://schemas.openxmlformats.org/presentationml/2006/main" xmlns:r="http://schemas.openxmlformats.org/officeDocument/2006/relationships">
+  <p:cSld>
+    <p:spTree>
+      <p:nvGrpSpPr>
+        <p:cNvPr id="1" name=""/>
+        <p:cNvGrpSpPr/>
+        <p:nvPr/>
+      </p:nvGrpSpPr>
+      <p:grpSpPr/>
+      <p:sp>
+        <p:nvSpPr>
+          <p:cNvPr id="2" name="TextBox 1"/>
+          <p:cNvSpPr txBox="1"/>
+          <p:nvPr/>
+        </p:nvSpPr>
+        <p:spPr>
+          <a:xfrm>
+            <a:off x="457200" y="274320"/>
+            <a:ext cx="11247120" cy="914400"/>
+          </a:xfrm>
+          <a:prstGeom prst="rect">
+            <a:avLst/>
+          </a:prstGeom>
+          <a:noFill/>
+        </p:spPr>
+        <p:txBody>
+          <a:bodyPr wrap="square">
+            <a:spAutoFit/>
+          </a:bodyPr>
+          <a:lstStyle/>
+          <a:p>
+            <a:pPr algn="l"/>
+            <a:r>
+              <a:rPr sz="2800" b="1">
+                <a:solidFill>
+                  <a:srgbClr val="1A1A2E"/>
+                </a:solidFill>
+              </a:rPr>
+              <a:t>What changes in Phase 2</a:t>
+            </a:r>
+          </a:p>
+        </p:txBody>
+      </p:sp>
+      <p:sp>
+        <p:nvSpPr>
+          <p:cNvPr id="3" name="TextBox 2"/>
+          <p:cNvSpPr txBox="1"/>
+          <p:nvPr/>
+        </p:nvSpPr>
+        <p:spPr>
+          <a:xfrm>
+            <a:off x="457200" y="1280160"/>
+            <a:ext cx="11247120" cy="5303520"/>
+          </a:xfrm>
+          <a:prstGeom prst="rect">
+            <a:avLst/>
+          </a:prstGeom>
+          <a:noFill/>
+        </p:spPr>
+        <p:txBody>
+          <a:bodyPr wrap="square">
+            <a:spAutoFit/>
+          </a:bodyPr>
+          <a:lstStyle/>
+          <a:p>
+            <a:pPr algn="l">
+              <a:spcAft>
+                <a:spcPts val="800"/>
+              </a:spcAft>
+            </a:pPr>
+            <a:r>
+              <a:rPr sz="1800"/>
+              <a:t>Additive on Phase 1, behind feature flags, in this order:</a:t>
+            </a:r>
+          </a:p>
+          <a:p>
+            <a:pPr/>
+            <a:r>
+              <a:rPr sz="1600"/>
+              <a:t>Vercel Pro (TOS compliance for paid customers).</a:t>
+            </a:r>
+          </a:p>
+          <a:p>
+            <a:pPr/>
+            <a:r>
+              <a:rPr sz="1600"/>
+              <a:t>In-app AI generation pipeline (Inngest + Anthropic API).</a:t>
+            </a:r>
+          </a:p>
+          <a:p>
+            <a:pPr/>
+            <a:r>
+              <a:rPr sz="1600"/>
+              <a:t>Opus critiques Sonnet drafts; answer-justification audit.</a:t>
+            </a:r>
+          </a:p>
+          <a:p>
+            <a:pPr/>
+            <a:r>
+              <a:rPr sz="1600"/>
+              <a:t>Confidence routing + sampled spot-checks.</a:t>
+            </a:r>
+          </a:p>
+          <a:p>
+            <a:pPr/>
+            <a:r>
+              <a:rPr sz="1600"/>
+              <a:t>B2B controls: SME role, two-eye gate, per-tenant catalogs.</a:t>
+            </a:r>
+          </a:p>
+          <a:p>
+            <a:pPr/>
+            <a:r>
+              <a:rPr sz="1600"/>
+              <a:t>Stripe billing.</a:t>
+            </a:r>
+          </a:p>
+          <a:p>
+            <a:pPr/>
+            <a:r>
+              <a:rPr sz="1600"/>
+              <a:t>Embedding-based suggestion dedup.</a:t>
+            </a:r>
+          </a:p>
+          <a:p>
+            <a:pPr>
+              <a:spcAft>
+                <a:spcPts val="600"/>
+              </a:spcAft>
+            </a:pPr>
+            <a:r>
+              <a:rPr sz="1600"/>
+              <a:t>Post-publish quality signals → "pause-not-pull".</a:t>
+            </a:r>
+          </a:p>
+          <a:p>
+            <a:pPr algn="l">
+              <a:spcAft>
+                <a:spcPts val="800"/>
+              </a:spcAft>
+            </a:pPr>
+            <a:r>
+              <a:rPr sz="1800"/>
+              <a:t>Nothing from Phase 1 is thrown away.</a:t>
+            </a:r>
+          </a:p>
+        </p:txBody>
+      </p:sp>
+    </p:spTree>
+  </p:cSld>
+  <p:clrMapOvr>
+    <a:masterClrMapping/>
+  </p:clrMapOvr>
+</p:sld>
+</file>
+
+<file path=ppt/slides/slide18.xml><?xml version="1.0" encoding="utf-8"?>
 <p:sld xmlns:a="http://schemas.openxmlformats.org/drawingml/2006/main" xmlns:p="http://schemas.openxmlformats.org/presentationml/2006/main" xmlns:r="http://schemas.openxmlformats.org/officeDocument/2006/relationships">
   <p:cSld>
     <p:spTree>
@@ -4518,7 +5273,7 @@
 </p:sld>
 </file>
 
-<file path=ppt/slides/slide18.xml><?xml version="1.0" encoding="utf-8"?>
+<file path=ppt/slides/slide19.xml><?xml version="1.0" encoding="utf-8"?>
 <p:sld xmlns:a="http://schemas.openxmlformats.org/drawingml/2006/main" xmlns:p="http://schemas.openxmlformats.org/presentationml/2006/main" xmlns:r="http://schemas.openxmlformats.org/officeDocument/2006/relationships">
   <p:cSld>
     <p:spTree>
@@ -4804,7 +5559,104 @@
 </p:sld>
 </file>
 
-<file path=ppt/slides/slide19.xml><?xml version="1.0" encoding="utf-8"?>
+<file path=ppt/slides/slide2.xml><?xml version="1.0" encoding="utf-8"?>
+<p:sld xmlns:a="http://schemas.openxmlformats.org/drawingml/2006/main" xmlns:p="http://schemas.openxmlformats.org/presentationml/2006/main" xmlns:r="http://schemas.openxmlformats.org/officeDocument/2006/relationships">
+  <p:cSld>
+    <p:spTree>
+      <p:nvGrpSpPr>
+        <p:cNvPr id="1" name=""/>
+        <p:cNvGrpSpPr/>
+        <p:nvPr/>
+      </p:nvGrpSpPr>
+      <p:grpSpPr/>
+      <p:sp>
+        <p:nvSpPr>
+          <p:cNvPr id="2" name="TextBox 1"/>
+          <p:cNvSpPr txBox="1"/>
+          <p:nvPr/>
+        </p:nvSpPr>
+        <p:spPr>
+          <a:xfrm>
+            <a:off x="457200" y="274320"/>
+            <a:ext cx="11247120" cy="914400"/>
+          </a:xfrm>
+          <a:prstGeom prst="rect">
+            <a:avLst/>
+          </a:prstGeom>
+          <a:noFill/>
+        </p:spPr>
+        <p:txBody>
+          <a:bodyPr wrap="square">
+            <a:spAutoFit/>
+          </a:bodyPr>
+          <a:lstStyle/>
+          <a:p>
+            <a:pPr algn="l"/>
+            <a:r>
+              <a:rPr sz="2800" b="1">
+                <a:solidFill>
+                  <a:srgbClr val="1A1A2E"/>
+                </a:solidFill>
+              </a:rPr>
+              <a:t>Content Pack Management Platform</a:t>
+            </a:r>
+          </a:p>
+        </p:txBody>
+      </p:sp>
+      <p:sp>
+        <p:nvSpPr>
+          <p:cNvPr id="3" name="TextBox 2"/>
+          <p:cNvSpPr txBox="1"/>
+          <p:nvPr/>
+        </p:nvSpPr>
+        <p:spPr>
+          <a:xfrm>
+            <a:off x="457200" y="1280160"/>
+            <a:ext cx="11247120" cy="5303520"/>
+          </a:xfrm>
+          <a:prstGeom prst="rect">
+            <a:avLst/>
+          </a:prstGeom>
+          <a:noFill/>
+        </p:spPr>
+        <p:txBody>
+          <a:bodyPr wrap="square">
+            <a:spAutoFit/>
+          </a:bodyPr>
+          <a:lstStyle/>
+          <a:p>
+            <a:pPr algn="l">
+              <a:spcAft>
+                <a:spcPts val="800"/>
+              </a:spcAft>
+            </a:pPr>
+            <a:r>
+              <a:rPr sz="1800"/>
+              <a:t>A focused learning platform for individuals and companies. Built in two phases — de-risk the AI cost before paying for AI.</a:t>
+            </a:r>
+          </a:p>
+          <a:p>
+            <a:pPr algn="l">
+              <a:spcAft>
+                <a:spcPts val="800"/>
+              </a:spcAft>
+            </a:pPr>
+            <a:r>
+              <a:rPr sz="1800"/>
+              <a:t>Branch: claude/content-pack-management-plan-gO7ys</a:t>
+            </a:r>
+          </a:p>
+        </p:txBody>
+      </p:sp>
+    </p:spTree>
+  </p:cSld>
+  <p:clrMapOvr>
+    <a:masterClrMapping/>
+  </p:clrMapOvr>
+</p:sld>
+</file>
+
+<file path=ppt/slides/slide20.xml><?xml version="1.0" encoding="utf-8"?>
 <p:sld xmlns:a="http://schemas.openxmlformats.org/drawingml/2006/main" xmlns:p="http://schemas.openxmlformats.org/presentationml/2006/main" xmlns:r="http://schemas.openxmlformats.org/officeDocument/2006/relationships">
   <p:cSld>
     <p:spTree>
@@ -5218,7 +6070,7 @@
 </p:sld>
 </file>
 
-<file path=ppt/slides/slide2.xml><?xml version="1.0" encoding="utf-8"?>
+<file path=ppt/slides/slide21.xml><?xml version="1.0" encoding="utf-8"?>
 <p:sld xmlns:a="http://schemas.openxmlformats.org/drawingml/2006/main" xmlns:p="http://schemas.openxmlformats.org/presentationml/2006/main" xmlns:r="http://schemas.openxmlformats.org/officeDocument/2006/relationships">
   <p:cSld>
     <p:spTree>
@@ -5257,7 +6109,7 @@
                   <a:srgbClr val="1A1A2E"/>
                 </a:solidFill>
               </a:rPr>
-              <a:t>Content Pack Management Platform</a:t>
+              <a:t>What we need to start Phase 1</a:t>
             </a:r>
           </a:p>
         </p:txBody>
@@ -5291,7 +6143,25 @@
             </a:pPr>
             <a:r>
               <a:rPr sz="1800"/>
-              <a:t>A focused learning platform for individuals and companies. Built in two phases — de-risk the AI cost before paying for AI.</a:t>
+              <a:t>Sign-off:</a:t>
+            </a:r>
+          </a:p>
+          <a:p>
+            <a:pPr/>
+            <a:r>
+              <a:rPr sz="1600"/>
+              <a:t>The two-phase plan is the right shape.</a:t>
+            </a:r>
+          </a:p>
+          <a:p>
+            <a:pPr>
+              <a:spcAft>
+                <a:spcPts val="600"/>
+              </a:spcAft>
+            </a:pPr>
+            <a:r>
+              <a:rPr sz="1600"/>
+              <a:t>Phase 1 success metric = signed LOIs + pre-orders is the right gate.</a:t>
             </a:r>
           </a:p>
           <a:p>
@@ -5302,7 +6172,50 @@
             </a:pPr>
             <a:r>
               <a:rPr sz="1800"/>
-              <a:t>Branch: claude/content-pack-management-plan-gO7ys</a:t>
+              <a:t>Resources:</a:t>
+            </a:r>
+          </a:p>
+          <a:p>
+            <a:pPr/>
+            <a:r>
+              <a:rPr sz="1600"/>
+              <a:t>~18 working days of focused build time.</a:t>
+            </a:r>
+          </a:p>
+          <a:p>
+            <a:pPr/>
+            <a:r>
+              <a:rPr sz="1600"/>
+              <a:t>One domain (~$12/yr).</a:t>
+            </a:r>
+          </a:p>
+          <a:p>
+            <a:pPr/>
+            <a:r>
+              <a:rPr sz="1600"/>
+              <a:t>Clerk + Neon + Vercel + R2 + PostHog + Sentry + Resend free-tier accounts.</a:t>
+            </a:r>
+          </a:p>
+          <a:p>
+            <a:pPr>
+              <a:spcAft>
+                <a:spcPts val="600"/>
+              </a:spcAft>
+            </a:pPr>
+            <a:r>
+              <a:rPr sz="1600"/>
+              <a:t>Stripe account (for the pre-order Payment Link).</a:t>
+            </a:r>
+          </a:p>
+          <a:p>
+            <a:pPr algn="l">
+              <a:spcAft>
+                <a:spcPts val="800"/>
+              </a:spcAft>
+            </a:pPr>
+            <a:r>
+              <a:rPr sz="1800"/>
+              <a:t>That's it. Phase 2 spend is gated on Phase 1 evidence.</a:t>
             </a:r>
           </a:p>
         </p:txBody>
@@ -5315,165 +6228,7 @@
 </p:sld>
 </file>
 
-<file path=ppt/slides/slide20.xml><?xml version="1.0" encoding="utf-8"?>
-<p:sld xmlns:a="http://schemas.openxmlformats.org/drawingml/2006/main" xmlns:p="http://schemas.openxmlformats.org/presentationml/2006/main" xmlns:r="http://schemas.openxmlformats.org/officeDocument/2006/relationships">
-  <p:cSld>
-    <p:spTree>
-      <p:nvGrpSpPr>
-        <p:cNvPr id="1" name=""/>
-        <p:cNvGrpSpPr/>
-        <p:nvPr/>
-      </p:nvGrpSpPr>
-      <p:grpSpPr/>
-      <p:sp>
-        <p:nvSpPr>
-          <p:cNvPr id="2" name="TextBox 1"/>
-          <p:cNvSpPr txBox="1"/>
-          <p:nvPr/>
-        </p:nvSpPr>
-        <p:spPr>
-          <a:xfrm>
-            <a:off x="457200" y="274320"/>
-            <a:ext cx="11247120" cy="914400"/>
-          </a:xfrm>
-          <a:prstGeom prst="rect">
-            <a:avLst/>
-          </a:prstGeom>
-          <a:noFill/>
-        </p:spPr>
-        <p:txBody>
-          <a:bodyPr wrap="square">
-            <a:spAutoFit/>
-          </a:bodyPr>
-          <a:lstStyle/>
-          <a:p>
-            <a:pPr algn="l"/>
-            <a:r>
-              <a:rPr sz="2800" b="1">
-                <a:solidFill>
-                  <a:srgbClr val="1A1A2E"/>
-                </a:solidFill>
-              </a:rPr>
-              <a:t>What we need to start Phase 1</a:t>
-            </a:r>
-          </a:p>
-        </p:txBody>
-      </p:sp>
-      <p:sp>
-        <p:nvSpPr>
-          <p:cNvPr id="3" name="TextBox 2"/>
-          <p:cNvSpPr txBox="1"/>
-          <p:nvPr/>
-        </p:nvSpPr>
-        <p:spPr>
-          <a:xfrm>
-            <a:off x="457200" y="1280160"/>
-            <a:ext cx="11247120" cy="5303520"/>
-          </a:xfrm>
-          <a:prstGeom prst="rect">
-            <a:avLst/>
-          </a:prstGeom>
-          <a:noFill/>
-        </p:spPr>
-        <p:txBody>
-          <a:bodyPr wrap="square">
-            <a:spAutoFit/>
-          </a:bodyPr>
-          <a:lstStyle/>
-          <a:p>
-            <a:pPr algn="l">
-              <a:spcAft>
-                <a:spcPts val="800"/>
-              </a:spcAft>
-            </a:pPr>
-            <a:r>
-              <a:rPr sz="1800"/>
-              <a:t>Sign-off:</a:t>
-            </a:r>
-          </a:p>
-          <a:p>
-            <a:pPr/>
-            <a:r>
-              <a:rPr sz="1600"/>
-              <a:t>The two-phase plan is the right shape.</a:t>
-            </a:r>
-          </a:p>
-          <a:p>
-            <a:pPr>
-              <a:spcAft>
-                <a:spcPts val="600"/>
-              </a:spcAft>
-            </a:pPr>
-            <a:r>
-              <a:rPr sz="1600"/>
-              <a:t>Phase 1 success metric = signed LOIs + pre-orders is the right gate.</a:t>
-            </a:r>
-          </a:p>
-          <a:p>
-            <a:pPr algn="l">
-              <a:spcAft>
-                <a:spcPts val="800"/>
-              </a:spcAft>
-            </a:pPr>
-            <a:r>
-              <a:rPr sz="1800"/>
-              <a:t>Resources:</a:t>
-            </a:r>
-          </a:p>
-          <a:p>
-            <a:pPr/>
-            <a:r>
-              <a:rPr sz="1600"/>
-              <a:t>~18 working days of focused build time.</a:t>
-            </a:r>
-          </a:p>
-          <a:p>
-            <a:pPr/>
-            <a:r>
-              <a:rPr sz="1600"/>
-              <a:t>One domain (~$12/yr).</a:t>
-            </a:r>
-          </a:p>
-          <a:p>
-            <a:pPr/>
-            <a:r>
-              <a:rPr sz="1600"/>
-              <a:t>Clerk + Neon + Vercel + R2 + PostHog + Sentry + Resend free-tier accounts.</a:t>
-            </a:r>
-          </a:p>
-          <a:p>
-            <a:pPr>
-              <a:spcAft>
-                <a:spcPts val="600"/>
-              </a:spcAft>
-            </a:pPr>
-            <a:r>
-              <a:rPr sz="1600"/>
-              <a:t>Stripe account (for the pre-order Payment Link).</a:t>
-            </a:r>
-          </a:p>
-          <a:p>
-            <a:pPr algn="l">
-              <a:spcAft>
-                <a:spcPts val="800"/>
-              </a:spcAft>
-            </a:pPr>
-            <a:r>
-              <a:rPr sz="1800"/>
-              <a:t>That's it. Phase 2 spend is gated on Phase 1 evidence.</a:t>
-            </a:r>
-          </a:p>
-        </p:txBody>
-      </p:sp>
-    </p:spTree>
-  </p:cSld>
-  <p:clrMapOvr>
-    <a:masterClrMapping/>
-  </p:clrMapOvr>
-</p:sld>
-</file>
-
-<file path=ppt/slides/slide21.xml><?xml version="1.0" encoding="utf-8"?>
+<file path=ppt/slides/slide22.xml><?xml version="1.0" encoding="utf-8"?>
 <p:sld xmlns:a="http://schemas.openxmlformats.org/drawingml/2006/main" xmlns:p="http://schemas.openxmlformats.org/presentationml/2006/main" xmlns:r="http://schemas.openxmlformats.org/officeDocument/2006/relationships">
   <p:cSld>
     <p:spTree>

--- a/plans/deck-overview.pptx
+++ b/plans/deck-overview.pptx
@@ -3872,7 +3872,7 @@
             </a:pPr>
             <a:r>
               <a:rPr sz="1800"/>
-              <a:t>Every mitigation is a shipped Phase-2 surface — not exhortation, not a "best-practice guideline." Outcome targets per Kirkpatrick L1–L4 in content-pack-management-plan.md §D4.</a:t>
+              <a:t>Every mitigation is a shipped Phase-2 surface — not exhortation, not a "best-practice guideline." Outcome targets per Kirkpatrick L1–L4 in content-pack-management-plan.md §D4. Full evidentiary basis in research-and-strategy-dossier.md — problem catalogue, mechanism set, industry case studies, per-problem falsification triggers, and commercial viability.</a:t>
             </a:r>
           </a:p>
         </p:txBody>
